--- a/output/260525_히로푸마키즈/HIRO_x_PUMA_KIDS_콜라보_제안서.pptx
+++ b/output/260525_히로푸마키즈/HIRO_x_PUMA_KIDS_콜라보_제안서.pptx
@@ -1404,7 +1404,7 @@
       </p:grpSpPr>
       <p:pic>
         <p:nvPicPr>
-          <p:cNvPr id="2" name="Image 0" descr="/Users/parkmyeongsu/Documents/kiro/3 (제안서)/_temp_slide_1.png">    </p:cNvPr>
+          <p:cNvPr id="2" name="Image 0" descr="/Users/parkmyeongsu/Documents/kiro/3 (제안서)/output/260525_히로푸마키즈/_tmp_1.png">    </p:cNvPr>
           <p:cNvPicPr>
             <a:picLocks noChangeAspect="1"/>
           </p:cNvPicPr>
@@ -1453,7 +1453,7 @@
       </p:grpSpPr>
       <p:pic>
         <p:nvPicPr>
-          <p:cNvPr id="2" name="Image 0" descr="/Users/parkmyeongsu/Documents/kiro/3 (제안서)/_temp_slide_2.png">    </p:cNvPr>
+          <p:cNvPr id="2" name="Image 0" descr="/Users/parkmyeongsu/Documents/kiro/3 (제안서)/output/260525_히로푸마키즈/_tmp_2.png">    </p:cNvPr>
           <p:cNvPicPr>
             <a:picLocks noChangeAspect="1"/>
           </p:cNvPicPr>
@@ -1502,7 +1502,7 @@
       </p:grpSpPr>
       <p:pic>
         <p:nvPicPr>
-          <p:cNvPr id="2" name="Image 0" descr="/Users/parkmyeongsu/Documents/kiro/3 (제안서)/_temp_slide_3.png">    </p:cNvPr>
+          <p:cNvPr id="2" name="Image 0" descr="/Users/parkmyeongsu/Documents/kiro/3 (제안서)/output/260525_히로푸마키즈/_tmp_3.png">    </p:cNvPr>
           <p:cNvPicPr>
             <a:picLocks noChangeAspect="1"/>
           </p:cNvPicPr>
@@ -1551,7 +1551,7 @@
       </p:grpSpPr>
       <p:pic>
         <p:nvPicPr>
-          <p:cNvPr id="2" name="Image 0" descr="/Users/parkmyeongsu/Documents/kiro/3 (제안서)/_temp_slide_4.png">    </p:cNvPr>
+          <p:cNvPr id="2" name="Image 0" descr="/Users/parkmyeongsu/Documents/kiro/3 (제안서)/output/260525_히로푸마키즈/_tmp_4.png">    </p:cNvPr>
           <p:cNvPicPr>
             <a:picLocks noChangeAspect="1"/>
           </p:cNvPicPr>
@@ -1600,7 +1600,7 @@
       </p:grpSpPr>
       <p:pic>
         <p:nvPicPr>
-          <p:cNvPr id="2" name="Image 0" descr="/Users/parkmyeongsu/Documents/kiro/3 (제안서)/_temp_slide_5.png">    </p:cNvPr>
+          <p:cNvPr id="2" name="Image 0" descr="/Users/parkmyeongsu/Documents/kiro/3 (제안서)/output/260525_히로푸마키즈/_tmp_5.png">    </p:cNvPr>
           <p:cNvPicPr>
             <a:picLocks noChangeAspect="1"/>
           </p:cNvPicPr>
@@ -1649,7 +1649,7 @@
       </p:grpSpPr>
       <p:pic>
         <p:nvPicPr>
-          <p:cNvPr id="2" name="Image 0" descr="/Users/parkmyeongsu/Documents/kiro/3 (제안서)/_temp_slide_6.png">    </p:cNvPr>
+          <p:cNvPr id="2" name="Image 0" descr="/Users/parkmyeongsu/Documents/kiro/3 (제안서)/output/260525_히로푸마키즈/_tmp_6.png">    </p:cNvPr>
           <p:cNvPicPr>
             <a:picLocks noChangeAspect="1"/>
           </p:cNvPicPr>
@@ -1698,7 +1698,7 @@
       </p:grpSpPr>
       <p:pic>
         <p:nvPicPr>
-          <p:cNvPr id="2" name="Image 0" descr="/Users/parkmyeongsu/Documents/kiro/3 (제안서)/_temp_slide_7.png">    </p:cNvPr>
+          <p:cNvPr id="2" name="Image 0" descr="/Users/parkmyeongsu/Documents/kiro/3 (제안서)/output/260525_히로푸마키즈/_tmp_7.png">    </p:cNvPr>
           <p:cNvPicPr>
             <a:picLocks noChangeAspect="1"/>
           </p:cNvPicPr>

--- a/output/260525_히로푸마키즈/HIRO_x_PUMA_KIDS_콜라보_제안서.pptx
+++ b/output/260525_히로푸마키즈/HIRO_x_PUMA_KIDS_콜라보_제안서.pptx
@@ -1404,7 +1404,7 @@
       </p:grpSpPr>
       <p:pic>
         <p:nvPicPr>
-          <p:cNvPr id="2" name="Image 0" descr="/Users/parkmyeongsu/Documents/kiro/3 (제안서)/output/260525_히로푸마키즈/_tmp_1.png">    </p:cNvPr>
+          <p:cNvPr id="2" name="Image 0" descr="/Users/parkmyeongsu/Documents/kiro/3 (제안서)/output/260525_히로푸마키즈/_export_1.png">    </p:cNvPr>
           <p:cNvPicPr>
             <a:picLocks noChangeAspect="1"/>
           </p:cNvPicPr>
@@ -1453,7 +1453,7 @@
       </p:grpSpPr>
       <p:pic>
         <p:nvPicPr>
-          <p:cNvPr id="2" name="Image 0" descr="/Users/parkmyeongsu/Documents/kiro/3 (제안서)/output/260525_히로푸마키즈/_tmp_2.png">    </p:cNvPr>
+          <p:cNvPr id="2" name="Image 0" descr="/Users/parkmyeongsu/Documents/kiro/3 (제안서)/output/260525_히로푸마키즈/_export_2.png">    </p:cNvPr>
           <p:cNvPicPr>
             <a:picLocks noChangeAspect="1"/>
           </p:cNvPicPr>
@@ -1502,7 +1502,7 @@
       </p:grpSpPr>
       <p:pic>
         <p:nvPicPr>
-          <p:cNvPr id="2" name="Image 0" descr="/Users/parkmyeongsu/Documents/kiro/3 (제안서)/output/260525_히로푸마키즈/_tmp_3.png">    </p:cNvPr>
+          <p:cNvPr id="2" name="Image 0" descr="/Users/parkmyeongsu/Documents/kiro/3 (제안서)/output/260525_히로푸마키즈/_export_3.png">    </p:cNvPr>
           <p:cNvPicPr>
             <a:picLocks noChangeAspect="1"/>
           </p:cNvPicPr>
@@ -1551,7 +1551,7 @@
       </p:grpSpPr>
       <p:pic>
         <p:nvPicPr>
-          <p:cNvPr id="2" name="Image 0" descr="/Users/parkmyeongsu/Documents/kiro/3 (제안서)/output/260525_히로푸마키즈/_tmp_4.png">    </p:cNvPr>
+          <p:cNvPr id="2" name="Image 0" descr="/Users/parkmyeongsu/Documents/kiro/3 (제안서)/output/260525_히로푸마키즈/_export_4.png">    </p:cNvPr>
           <p:cNvPicPr>
             <a:picLocks noChangeAspect="1"/>
           </p:cNvPicPr>
@@ -1600,7 +1600,7 @@
       </p:grpSpPr>
       <p:pic>
         <p:nvPicPr>
-          <p:cNvPr id="2" name="Image 0" descr="/Users/parkmyeongsu/Documents/kiro/3 (제안서)/output/260525_히로푸마키즈/_tmp_5.png">    </p:cNvPr>
+          <p:cNvPr id="2" name="Image 0" descr="/Users/parkmyeongsu/Documents/kiro/3 (제안서)/output/260525_히로푸마키즈/_export_5.png">    </p:cNvPr>
           <p:cNvPicPr>
             <a:picLocks noChangeAspect="1"/>
           </p:cNvPicPr>
@@ -1649,7 +1649,7 @@
       </p:grpSpPr>
       <p:pic>
         <p:nvPicPr>
-          <p:cNvPr id="2" name="Image 0" descr="/Users/parkmyeongsu/Documents/kiro/3 (제안서)/output/260525_히로푸마키즈/_tmp_6.png">    </p:cNvPr>
+          <p:cNvPr id="2" name="Image 0" descr="/Users/parkmyeongsu/Documents/kiro/3 (제안서)/output/260525_히로푸마키즈/_export_6.png">    </p:cNvPr>
           <p:cNvPicPr>
             <a:picLocks noChangeAspect="1"/>
           </p:cNvPicPr>
@@ -1698,7 +1698,7 @@
       </p:grpSpPr>
       <p:pic>
         <p:nvPicPr>
-          <p:cNvPr id="2" name="Image 0" descr="/Users/parkmyeongsu/Documents/kiro/3 (제안서)/output/260525_히로푸마키즈/_tmp_7.png">    </p:cNvPr>
+          <p:cNvPr id="2" name="Image 0" descr="/Users/parkmyeongsu/Documents/kiro/3 (제안서)/output/260525_히로푸마키즈/_export_7.png">    </p:cNvPr>
           <p:cNvPicPr>
             <a:picLocks noChangeAspect="1"/>
           </p:cNvPicPr>
